--- a/slides/C24_MLP.pptx
+++ b/slides/C24_MLP.pptx
@@ -5,10 +5,10 @@
     <p:sldMasterId id="2147483648" r:id="rId1"/>
   </p:sldMasterIdLst>
   <p:notesMasterIdLst>
-    <p:notesMasterId r:id="rId30"/>
+    <p:notesMasterId r:id="rId31"/>
   </p:notesMasterIdLst>
   <p:handoutMasterIdLst>
-    <p:handoutMasterId r:id="rId31"/>
+    <p:handoutMasterId r:id="rId32"/>
   </p:handoutMasterIdLst>
   <p:sldIdLst>
     <p:sldId id="256" r:id="rId2"/>
@@ -37,8 +37,9 @@
     <p:sldId id="438" r:id="rId25"/>
     <p:sldId id="413" r:id="rId26"/>
     <p:sldId id="433" r:id="rId27"/>
-    <p:sldId id="293" r:id="rId28"/>
-    <p:sldId id="306" r:id="rId29"/>
+    <p:sldId id="548" r:id="rId28"/>
+    <p:sldId id="293" r:id="rId29"/>
+    <p:sldId id="306" r:id="rId30"/>
   </p:sldIdLst>
   <p:sldSz cx="12192000" cy="6858000"/>
   <p:notesSz cx="7315200" cy="9601200"/>
@@ -6631,19 +6632,7 @@
                       <a:rPr lang="pt-BR" sz="2400" b="0" i="1" smtClean="0">
                         <a:latin typeface="Cambria Math" panose="02040503050406030204" pitchFamily="18" charset="0"/>
                       </a:rPr>
-                      <m:t>=</m:t>
-                    </m:r>
-                    <m:r>
-                      <a:rPr lang="pt-BR" sz="2400" b="0" i="1" smtClean="0">
-                        <a:latin typeface="Cambria Math" panose="02040503050406030204" pitchFamily="18" charset="0"/>
-                      </a:rPr>
-                      <m:t>1</m:t>
-                    </m:r>
-                    <m:r>
-                      <a:rPr lang="pt-BR" sz="2400" b="0" i="1" smtClean="0">
-                        <a:latin typeface="Cambria Math" panose="02040503050406030204" pitchFamily="18" charset="0"/>
-                      </a:rPr>
-                      <m:t>,…, </m:t>
+                      <m:t>=1,…, </m:t>
                     </m:r>
                     <m:r>
                       <a:rPr lang="pt-BR" sz="2400" b="0" i="1" smtClean="0">
@@ -6708,19 +6697,7 @@
                       <a:rPr lang="pt-BR" i="1">
                         <a:latin typeface="Cambria Math" panose="02040503050406030204" pitchFamily="18" charset="0"/>
                       </a:rPr>
-                      <m:t>=</m:t>
-                    </m:r>
-                    <m:r>
-                      <a:rPr lang="pt-BR" i="1">
-                        <a:latin typeface="Cambria Math" panose="02040503050406030204" pitchFamily="18" charset="0"/>
-                      </a:rPr>
-                      <m:t>1</m:t>
-                    </m:r>
-                    <m:r>
-                      <a:rPr lang="pt-BR" i="1">
-                        <a:latin typeface="Cambria Math" panose="02040503050406030204" pitchFamily="18" charset="0"/>
-                      </a:rPr>
-                      <m:t>,…, </m:t>
+                      <m:t>=1,…, </m:t>
                     </m:r>
                     <m:r>
                       <a:rPr lang="pt-BR" i="1">
@@ -7145,8 +7122,8 @@
           </a:p>
         </p:txBody>
       </p:sp>
-      <mc:AlternateContent xmlns:mc="http://schemas.openxmlformats.org/markup-compatibility/2006">
-        <mc:Choice xmlns:a14="http://schemas.microsoft.com/office/drawing/2010/main" Requires="a14">
+      <mc:AlternateContent xmlns:mc="http://schemas.openxmlformats.org/markup-compatibility/2006" xmlns:a14="http://schemas.microsoft.com/office/drawing/2010/main">
+        <mc:Choice Requires="a14">
           <p:sp>
             <p:nvSpPr>
               <p:cNvPr id="3" name="Espaço Reservado para Conteúdo 2">
@@ -7357,7 +7334,7 @@
             </p:txBody>
           </p:sp>
         </mc:Choice>
-        <mc:Fallback>
+        <mc:Fallback xmlns="">
           <p:sp>
             <p:nvSpPr>
               <p:cNvPr id="3" name="Espaço Reservado para Conteúdo 2">
@@ -21393,6 +21370,83 @@
           <a:chExt cx="0" cy="0"/>
         </a:xfrm>
       </p:grpSpPr>
+      <p:pic>
+        <p:nvPicPr>
+          <p:cNvPr id="1026" name="Picture 2" descr="Eric Jang: Machine Learning Memes">
+            <a:extLst>
+              <a:ext uri="{FF2B5EF4-FFF2-40B4-BE49-F238E27FC236}">
+                <a16:creationId xmlns:a16="http://schemas.microsoft.com/office/drawing/2014/main" id="{434BD8D2-A10B-6CEF-7BE4-F378CFBBCB67}"/>
+              </a:ext>
+            </a:extLst>
+          </p:cNvPr>
+          <p:cNvPicPr>
+            <a:picLocks noChangeAspect="1" noChangeArrowheads="1"/>
+          </p:cNvPicPr>
+          <p:nvPr/>
+        </p:nvPicPr>
+        <p:blipFill rotWithShape="1">
+          <a:blip r:embed="rId2">
+            <a:extLst>
+              <a:ext uri="{28A0092B-C50C-407E-A947-70E740481C1C}">
+                <a14:useLocalDpi xmlns:a14="http://schemas.microsoft.com/office/drawing/2010/main" val="0"/>
+              </a:ext>
+            </a:extLst>
+          </a:blip>
+          <a:srcRect l="3016" t="7142" r="3016" b="9207"/>
+          <a:stretch>
+            <a:fillRect/>
+          </a:stretch>
+        </p:blipFill>
+        <p:spPr bwMode="auto">
+          <a:xfrm>
+            <a:off x="1306285" y="489856"/>
+            <a:ext cx="6444343" cy="5736773"/>
+          </a:xfrm>
+          <a:prstGeom prst="rect">
+            <a:avLst/>
+          </a:prstGeom>
+          <a:noFill/>
+          <a:extLst>
+            <a:ext uri="{909E8E84-426E-40DD-AFC4-6F175D3DCCD1}">
+              <a14:hiddenFill xmlns:a14="http://schemas.microsoft.com/office/drawing/2010/main">
+                <a:solidFill>
+                  <a:srgbClr val="FFFFFF"/>
+                </a:solidFill>
+              </a14:hiddenFill>
+            </a:ext>
+          </a:extLst>
+        </p:spPr>
+      </p:pic>
+    </p:spTree>
+    <p:extLst>
+      <p:ext uri="{BB962C8B-B14F-4D97-AF65-F5344CB8AC3E}">
+        <p14:creationId xmlns:p14="http://schemas.microsoft.com/office/powerpoint/2010/main" val="3350240848"/>
+      </p:ext>
+    </p:extLst>
+  </p:cSld>
+  <p:clrMapOvr>
+    <a:masterClrMapping/>
+  </p:clrMapOvr>
+</p:sld>
+</file>
+
+<file path=ppt/slides/slide28.xml><?xml version="1.0" encoding="utf-8"?>
+<p:sld xmlns:a="http://schemas.openxmlformats.org/drawingml/2006/main" xmlns:r="http://schemas.openxmlformats.org/officeDocument/2006/relationships" xmlns:p="http://schemas.openxmlformats.org/presentationml/2006/main">
+  <p:cSld>
+    <p:spTree>
+      <p:nvGrpSpPr>
+        <p:cNvPr id="1" name=""/>
+        <p:cNvGrpSpPr/>
+        <p:nvPr/>
+      </p:nvGrpSpPr>
+      <p:grpSpPr>
+        <a:xfrm>
+          <a:off x="0" y="0"/>
+          <a:ext cx="0" cy="0"/>
+          <a:chOff x="0" y="0"/>
+          <a:chExt cx="0" cy="0"/>
+        </a:xfrm>
+      </p:grpSpPr>
       <p:sp>
         <p:nvSpPr>
           <p:cNvPr id="4" name="Título 1">
@@ -21462,7 +21516,7 @@
 </p:sld>
 </file>
 
-<file path=ppt/slides/slide28.xml><?xml version="1.0" encoding="utf-8"?>
+<file path=ppt/slides/slide29.xml><?xml version="1.0" encoding="utf-8"?>
 <p:sld xmlns:a="http://schemas.openxmlformats.org/drawingml/2006/main" xmlns:r="http://schemas.openxmlformats.org/officeDocument/2006/relationships" xmlns:p="http://schemas.openxmlformats.org/presentationml/2006/main">
   <p:cSld>
     <p:spTree>

--- a/slides/C24_MLP.pptx
+++ b/slides/C24_MLP.pptx
@@ -37,10 +37,10 @@
     <p:sldId id="550" r:id="rId25"/>
     <p:sldId id="551" r:id="rId26"/>
     <p:sldId id="566" r:id="rId27"/>
-    <p:sldId id="552" r:id="rId28"/>
-    <p:sldId id="554" r:id="rId29"/>
-    <p:sldId id="567" r:id="rId30"/>
-    <p:sldId id="547" r:id="rId31"/>
+    <p:sldId id="554" r:id="rId28"/>
+    <p:sldId id="567" r:id="rId29"/>
+    <p:sldId id="547" r:id="rId30"/>
+    <p:sldId id="552" r:id="rId31"/>
     <p:sldId id="557" r:id="rId32"/>
     <p:sldId id="431" r:id="rId33"/>
     <p:sldId id="549" r:id="rId34"/>
@@ -309,7 +309,7 @@
           <a:p>
             <a:fld id="{144F1436-6906-4D93-B7A2-786C327BFA14}" type="datetimeFigureOut">
               <a:rPr lang="nl-BE" smtClean="0"/>
-              <a:t>6/03/2026</a:t>
+              <a:t>7/03/2026</a:t>
             </a:fld>
             <a:endParaRPr lang="nl-BE"/>
           </a:p>
@@ -474,7 +474,7 @@
           <a:p>
             <a:fld id="{AA8CD09E-2914-4F47-B6C1-51B2C31814C9}" type="datetimeFigureOut">
               <a:rPr lang="pt-BR" smtClean="0"/>
-              <a:t>06/03/2026</a:t>
+              <a:t>07/03/2026</a:t>
             </a:fld>
             <a:endParaRPr lang="pt-BR"/>
           </a:p>
@@ -3505,7 +3505,7 @@
           <a:p>
             <a:fld id="{63289F7E-B80B-496E-81B4-D396C37C9454}" type="datetimeFigureOut">
               <a:rPr lang="pt-BR" smtClean="0"/>
-              <a:t>06/03/2026</a:t>
+              <a:t>07/03/2026</a:t>
             </a:fld>
             <a:endParaRPr lang="pt-BR"/>
           </a:p>
@@ -3703,7 +3703,7 @@
           <a:p>
             <a:fld id="{63289F7E-B80B-496E-81B4-D396C37C9454}" type="datetimeFigureOut">
               <a:rPr lang="pt-BR" smtClean="0"/>
-              <a:t>06/03/2026</a:t>
+              <a:t>07/03/2026</a:t>
             </a:fld>
             <a:endParaRPr lang="pt-BR"/>
           </a:p>
@@ -3911,7 +3911,7 @@
           <a:p>
             <a:fld id="{63289F7E-B80B-496E-81B4-D396C37C9454}" type="datetimeFigureOut">
               <a:rPr lang="pt-BR" smtClean="0"/>
-              <a:t>06/03/2026</a:t>
+              <a:t>07/03/2026</a:t>
             </a:fld>
             <a:endParaRPr lang="pt-BR"/>
           </a:p>
@@ -4109,7 +4109,7 @@
           <a:p>
             <a:fld id="{63289F7E-B80B-496E-81B4-D396C37C9454}" type="datetimeFigureOut">
               <a:rPr lang="pt-BR" smtClean="0"/>
-              <a:t>06/03/2026</a:t>
+              <a:t>07/03/2026</a:t>
             </a:fld>
             <a:endParaRPr lang="pt-BR"/>
           </a:p>
@@ -4384,7 +4384,7 @@
           <a:p>
             <a:fld id="{63289F7E-B80B-496E-81B4-D396C37C9454}" type="datetimeFigureOut">
               <a:rPr lang="pt-BR" smtClean="0"/>
-              <a:t>06/03/2026</a:t>
+              <a:t>07/03/2026</a:t>
             </a:fld>
             <a:endParaRPr lang="pt-BR"/>
           </a:p>
@@ -4649,7 +4649,7 @@
           <a:p>
             <a:fld id="{63289F7E-B80B-496E-81B4-D396C37C9454}" type="datetimeFigureOut">
               <a:rPr lang="pt-BR" smtClean="0"/>
-              <a:t>06/03/2026</a:t>
+              <a:t>07/03/2026</a:t>
             </a:fld>
             <a:endParaRPr lang="pt-BR"/>
           </a:p>
@@ -5061,7 +5061,7 @@
           <a:p>
             <a:fld id="{63289F7E-B80B-496E-81B4-D396C37C9454}" type="datetimeFigureOut">
               <a:rPr lang="pt-BR" smtClean="0"/>
-              <a:t>06/03/2026</a:t>
+              <a:t>07/03/2026</a:t>
             </a:fld>
             <a:endParaRPr lang="pt-BR"/>
           </a:p>
@@ -5202,7 +5202,7 @@
           <a:p>
             <a:fld id="{63289F7E-B80B-496E-81B4-D396C37C9454}" type="datetimeFigureOut">
               <a:rPr lang="pt-BR" smtClean="0"/>
-              <a:t>06/03/2026</a:t>
+              <a:t>07/03/2026</a:t>
             </a:fld>
             <a:endParaRPr lang="pt-BR"/>
           </a:p>
@@ -5315,7 +5315,7 @@
           <a:p>
             <a:fld id="{63289F7E-B80B-496E-81B4-D396C37C9454}" type="datetimeFigureOut">
               <a:rPr lang="pt-BR" smtClean="0"/>
-              <a:t>06/03/2026</a:t>
+              <a:t>07/03/2026</a:t>
             </a:fld>
             <a:endParaRPr lang="pt-BR"/>
           </a:p>
@@ -5626,7 +5626,7 @@
           <a:p>
             <a:fld id="{63289F7E-B80B-496E-81B4-D396C37C9454}" type="datetimeFigureOut">
               <a:rPr lang="pt-BR" smtClean="0"/>
-              <a:t>06/03/2026</a:t>
+              <a:t>07/03/2026</a:t>
             </a:fld>
             <a:endParaRPr lang="pt-BR"/>
           </a:p>
@@ -5914,7 +5914,7 @@
           <a:p>
             <a:fld id="{63289F7E-B80B-496E-81B4-D396C37C9454}" type="datetimeFigureOut">
               <a:rPr lang="pt-BR" smtClean="0"/>
-              <a:t>06/03/2026</a:t>
+              <a:t>07/03/2026</a:t>
             </a:fld>
             <a:endParaRPr lang="pt-BR"/>
           </a:p>
@@ -6155,7 +6155,7 @@
           <a:p>
             <a:fld id="{63289F7E-B80B-496E-81B4-D396C37C9454}" type="datetimeFigureOut">
               <a:rPr lang="pt-BR" smtClean="0"/>
-              <a:t>06/03/2026</a:t>
+              <a:t>07/03/2026</a:t>
             </a:fld>
             <a:endParaRPr lang="pt-BR"/>
           </a:p>
@@ -9267,8 +9267,8 @@
           </a:p>
         </p:txBody>
       </p:sp>
-      <mc:AlternateContent xmlns:mc="http://schemas.openxmlformats.org/markup-compatibility/2006">
-        <mc:Choice xmlns:a14="http://schemas.microsoft.com/office/drawing/2010/main" Requires="a14">
+      <mc:AlternateContent xmlns:mc="http://schemas.openxmlformats.org/markup-compatibility/2006" xmlns:a14="http://schemas.microsoft.com/office/drawing/2010/main">
+        <mc:Choice Requires="a14">
           <p:sp>
             <p:nvSpPr>
               <p:cNvPr id="3" name="Espaço Reservado para Conteúdo 2">
@@ -9483,7 +9483,7 @@
             </p:txBody>
           </p:sp>
         </mc:Choice>
-        <mc:Fallback>
+        <mc:Fallback xmlns="">
           <p:sp>
             <p:nvSpPr>
               <p:cNvPr id="3" name="Espaço Reservado para Conteúdo 2">
@@ -27491,103 +27491,6 @@
           <p:cNvPr id="2" name="Title 1">
             <a:extLst>
               <a:ext uri="{FF2B5EF4-FFF2-40B4-BE49-F238E27FC236}">
-                <a16:creationId xmlns:a16="http://schemas.microsoft.com/office/drawing/2014/main" id="{7114AB47-9AB2-E3F2-CEC8-368FEAC2E99A}"/>
-              </a:ext>
-            </a:extLst>
-          </p:cNvPr>
-          <p:cNvSpPr>
-            <a:spLocks noGrp="1"/>
-          </p:cNvSpPr>
-          <p:nvPr>
-            <p:ph type="title"/>
-          </p:nvPr>
-        </p:nvSpPr>
-        <p:spPr/>
-        <p:txBody>
-          <a:bodyPr/>
-          <a:lstStyle/>
-          <a:p>
-            <a:endParaRPr lang="en-US"/>
-          </a:p>
-        </p:txBody>
-      </p:sp>
-      <p:sp>
-        <p:nvSpPr>
-          <p:cNvPr id="3" name="Content Placeholder 2">
-            <a:extLst>
-              <a:ext uri="{FF2B5EF4-FFF2-40B4-BE49-F238E27FC236}">
-                <a16:creationId xmlns:a16="http://schemas.microsoft.com/office/drawing/2014/main" id="{F173E0E8-9B6B-7C0D-137B-0063D0F4A361}"/>
-              </a:ext>
-            </a:extLst>
-          </p:cNvPr>
-          <p:cNvSpPr>
-            <a:spLocks noGrp="1"/>
-          </p:cNvSpPr>
-          <p:nvPr>
-            <p:ph idx="1"/>
-          </p:nvPr>
-        </p:nvSpPr>
-        <p:spPr/>
-        <p:txBody>
-          <a:bodyPr>
-            <a:normAutofit/>
-          </a:bodyPr>
-          <a:lstStyle/>
-          <a:p>
-            <a:pPr marL="0" indent="0">
-              <a:buNone/>
-            </a:pPr>
-            <a:r>
-              <a:rPr lang="pt-BR" sz="4800" b="1" dirty="0">
-                <a:solidFill>
-                  <a:srgbClr val="FF0000"/>
-                </a:solidFill>
-              </a:rPr>
-              <a:t>PAREI AQUI!!!!!!!!!</a:t>
-            </a:r>
-            <a:endParaRPr lang="en-US" sz="4800" b="1" dirty="0">
-              <a:solidFill>
-                <a:srgbClr val="FF0000"/>
-              </a:solidFill>
-            </a:endParaRPr>
-          </a:p>
-        </p:txBody>
-      </p:sp>
-    </p:spTree>
-    <p:extLst>
-      <p:ext uri="{BB962C8B-B14F-4D97-AF65-F5344CB8AC3E}">
-        <p14:creationId xmlns:p14="http://schemas.microsoft.com/office/powerpoint/2010/main" val="3794195524"/>
-      </p:ext>
-    </p:extLst>
-  </p:cSld>
-  <p:clrMapOvr>
-    <a:masterClrMapping/>
-  </p:clrMapOvr>
-</p:sld>
-</file>
-
-<file path=ppt/slides/slide28.xml><?xml version="1.0" encoding="utf-8"?>
-<p:sld xmlns:a="http://schemas.openxmlformats.org/drawingml/2006/main" xmlns:r="http://schemas.openxmlformats.org/officeDocument/2006/relationships" xmlns:p="http://schemas.openxmlformats.org/presentationml/2006/main">
-  <p:cSld>
-    <p:spTree>
-      <p:nvGrpSpPr>
-        <p:cNvPr id="1" name=""/>
-        <p:cNvGrpSpPr/>
-        <p:nvPr/>
-      </p:nvGrpSpPr>
-      <p:grpSpPr>
-        <a:xfrm>
-          <a:off x="0" y="0"/>
-          <a:ext cx="0" cy="0"/>
-          <a:chOff x="0" y="0"/>
-          <a:chExt cx="0" cy="0"/>
-        </a:xfrm>
-      </p:grpSpPr>
-      <p:sp>
-        <p:nvSpPr>
-          <p:cNvPr id="2" name="Title 1">
-            <a:extLst>
-              <a:ext uri="{FF2B5EF4-FFF2-40B4-BE49-F238E27FC236}">
                 <a16:creationId xmlns:a16="http://schemas.microsoft.com/office/drawing/2014/main" id="{8622042E-E154-9255-670A-2165DE0B18C0}"/>
               </a:ext>
             </a:extLst>
@@ -27732,7 +27635,7 @@
 </p:sld>
 </file>
 
-<file path=ppt/slides/slide29.xml><?xml version="1.0" encoding="utf-8"?>
+<file path=ppt/slides/slide28.xml><?xml version="1.0" encoding="utf-8"?>
 <p:sld xmlns:a="http://schemas.openxmlformats.org/drawingml/2006/main" xmlns:r="http://schemas.openxmlformats.org/officeDocument/2006/relationships" xmlns:p="http://schemas.openxmlformats.org/presentationml/2006/main">
   <p:cSld>
     <p:spTree>
@@ -27803,7 +27706,7 @@
         <p:spPr>
           <a:xfrm>
             <a:off x="5466735" y="1825624"/>
-            <a:ext cx="6577781" cy="5032375"/>
+            <a:ext cx="6725265" cy="5032375"/>
           </a:xfrm>
         </p:spPr>
         <p:txBody>
@@ -27822,7 +27725,7 @@
             </a:r>
             <a:r>
               <a:rPr lang="pt-BR" dirty="0"/>
-              <a:t> é calcular como cada peso da rede contribui para o erro e ajustá-lo de forma a reduzir esse erro.</a:t>
+              <a:t> é calcular o quanto cada peso da rede contribui para o erro e ajustá-lo de forma a minimizar o erro.</a:t>
             </a:r>
           </a:p>
           <a:p>
@@ -27940,6 +27843,161 @@
     <p:extLst>
       <p:ext uri="{BB962C8B-B14F-4D97-AF65-F5344CB8AC3E}">
         <p14:creationId xmlns:p14="http://schemas.microsoft.com/office/powerpoint/2010/main" val="2282830082"/>
+      </p:ext>
+    </p:extLst>
+  </p:cSld>
+  <p:clrMapOvr>
+    <a:masterClrMapping/>
+  </p:clrMapOvr>
+</p:sld>
+</file>
+
+<file path=ppt/slides/slide29.xml><?xml version="1.0" encoding="utf-8"?>
+<p:sld xmlns:a="http://schemas.openxmlformats.org/drawingml/2006/main" xmlns:r="http://schemas.openxmlformats.org/officeDocument/2006/relationships" xmlns:p="http://schemas.openxmlformats.org/presentationml/2006/main">
+  <p:cSld>
+    <p:spTree>
+      <p:nvGrpSpPr>
+        <p:cNvPr id="1" name=""/>
+        <p:cNvGrpSpPr/>
+        <p:nvPr/>
+      </p:nvGrpSpPr>
+      <p:grpSpPr>
+        <a:xfrm>
+          <a:off x="0" y="0"/>
+          <a:ext cx="0" cy="0"/>
+          <a:chOff x="0" y="0"/>
+          <a:chExt cx="0" cy="0"/>
+        </a:xfrm>
+      </p:grpSpPr>
+      <p:sp>
+        <p:nvSpPr>
+          <p:cNvPr id="2" name="Title 1">
+            <a:extLst>
+              <a:ext uri="{FF2B5EF4-FFF2-40B4-BE49-F238E27FC236}">
+                <a16:creationId xmlns:a16="http://schemas.microsoft.com/office/drawing/2014/main" id="{139CD25A-051E-2532-A1B8-176C742EECEB}"/>
+              </a:ext>
+            </a:extLst>
+          </p:cNvPr>
+          <p:cNvSpPr>
+            <a:spLocks noGrp="1"/>
+          </p:cNvSpPr>
+          <p:nvPr>
+            <p:ph type="title"/>
+          </p:nvPr>
+        </p:nvSpPr>
+        <p:spPr/>
+        <p:txBody>
+          <a:bodyPr/>
+          <a:lstStyle/>
+          <a:p>
+            <a:r>
+              <a:rPr lang="pt-BR" i="1" dirty="0" err="1"/>
+              <a:t>Backpropagation</a:t>
+            </a:r>
+            <a:endParaRPr lang="en-US" dirty="0"/>
+          </a:p>
+        </p:txBody>
+      </p:sp>
+      <p:sp>
+        <p:nvSpPr>
+          <p:cNvPr id="3" name="Content Placeholder 2">
+            <a:extLst>
+              <a:ext uri="{FF2B5EF4-FFF2-40B4-BE49-F238E27FC236}">
+                <a16:creationId xmlns:a16="http://schemas.microsoft.com/office/drawing/2014/main" id="{F2837435-CAA9-AE41-D90E-E6FA914481A4}"/>
+              </a:ext>
+            </a:extLst>
+          </p:cNvPr>
+          <p:cNvSpPr>
+            <a:spLocks noGrp="1"/>
+          </p:cNvSpPr>
+          <p:nvPr>
+            <p:ph idx="1"/>
+          </p:nvPr>
+        </p:nvSpPr>
+        <p:spPr>
+          <a:xfrm>
+            <a:off x="838201" y="1825625"/>
+            <a:ext cx="11157154" cy="4351338"/>
+          </a:xfrm>
+        </p:spPr>
+        <p:txBody>
+          <a:bodyPr/>
+          <a:lstStyle/>
+          <a:p>
+            <a:r>
+              <a:rPr lang="pt-BR" dirty="0"/>
+              <a:t>A rede prediz → mede o erro → corrige os pesos.</a:t>
+            </a:r>
+          </a:p>
+          <a:p>
+            <a:r>
+              <a:rPr lang="pt-BR" dirty="0"/>
+              <a:t>O </a:t>
+            </a:r>
+            <a:r>
+              <a:rPr lang="pt-BR" i="1" dirty="0" err="1"/>
+              <a:t>backpropagation</a:t>
+            </a:r>
+            <a:r>
+              <a:rPr lang="pt-BR" dirty="0"/>
+              <a:t> responde à pergunta:</a:t>
+            </a:r>
+          </a:p>
+          <a:p>
+            <a:pPr marL="0" indent="0" algn="ctr">
+              <a:buNone/>
+            </a:pPr>
+            <a:r>
+              <a:rPr lang="pt-BR" b="1" dirty="0"/>
+              <a:t>“Quais pesos precisam mudar e o quanto eles precisam mudar para que a rede produza uma saída mais correta?”</a:t>
+            </a:r>
+            <a:endParaRPr lang="pt-BR" dirty="0"/>
+          </a:p>
+          <a:p>
+            <a:endParaRPr lang="en-US" dirty="0"/>
+          </a:p>
+        </p:txBody>
+      </p:sp>
+      <p:pic>
+        <p:nvPicPr>
+          <p:cNvPr id="8" name="Picture 7">
+            <a:extLst>
+              <a:ext uri="{FF2B5EF4-FFF2-40B4-BE49-F238E27FC236}">
+                <a16:creationId xmlns:a16="http://schemas.microsoft.com/office/drawing/2014/main" id="{CB13E6A6-6D4A-0E94-E375-65268C21503E}"/>
+              </a:ext>
+            </a:extLst>
+          </p:cNvPr>
+          <p:cNvPicPr>
+            <a:picLocks noChangeAspect="1"/>
+          </p:cNvPicPr>
+          <p:nvPr/>
+        </p:nvPicPr>
+        <p:blipFill>
+          <a:blip r:embed="rId2">
+            <a:extLst>
+              <a:ext uri="{28A0092B-C50C-407E-A947-70E740481C1C}">
+                <a14:useLocalDpi xmlns:a14="http://schemas.microsoft.com/office/drawing/2010/main" val="0"/>
+              </a:ext>
+            </a:extLst>
+          </a:blip>
+          <a:stretch>
+            <a:fillRect/>
+          </a:stretch>
+        </p:blipFill>
+        <p:spPr>
+          <a:xfrm>
+            <a:off x="4174355" y="3697491"/>
+            <a:ext cx="3160509" cy="3160509"/>
+          </a:xfrm>
+          <a:prstGeom prst="rect">
+            <a:avLst/>
+          </a:prstGeom>
+        </p:spPr>
+      </p:pic>
+    </p:spTree>
+    <p:extLst>
+      <p:ext uri="{BB962C8B-B14F-4D97-AF65-F5344CB8AC3E}">
+        <p14:creationId xmlns:p14="http://schemas.microsoft.com/office/powerpoint/2010/main" val="3050902542"/>
       </p:ext>
     </p:extLst>
   </p:cSld>
@@ -28184,7 +28242,7 @@
           <p:cNvPr id="2" name="Title 1">
             <a:extLst>
               <a:ext uri="{FF2B5EF4-FFF2-40B4-BE49-F238E27FC236}">
-                <a16:creationId xmlns:a16="http://schemas.microsoft.com/office/drawing/2014/main" id="{139CD25A-051E-2532-A1B8-176C742EECEB}"/>
+                <a16:creationId xmlns:a16="http://schemas.microsoft.com/office/drawing/2014/main" id="{7114AB47-9AB2-E3F2-CEC8-368FEAC2E99A}"/>
               </a:ext>
             </a:extLst>
           </p:cNvPr>
@@ -28209,7 +28267,7 @@
           <p:cNvPr id="3" name="Content Placeholder 2">
             <a:extLst>
               <a:ext uri="{FF2B5EF4-FFF2-40B4-BE49-F238E27FC236}">
-                <a16:creationId xmlns:a16="http://schemas.microsoft.com/office/drawing/2014/main" id="{F2837435-CAA9-AE41-D90E-E6FA914481A4}"/>
+                <a16:creationId xmlns:a16="http://schemas.microsoft.com/office/drawing/2014/main" id="{F173E0E8-9B6B-7C0D-137B-0063D0F4A361}"/>
               </a:ext>
             </a:extLst>
           </p:cNvPr>
@@ -28222,54 +28280,34 @@
         </p:nvSpPr>
         <p:spPr/>
         <p:txBody>
-          <a:bodyPr/>
+          <a:bodyPr>
+            <a:normAutofit/>
+          </a:bodyPr>
           <a:lstStyle/>
           <a:p>
-            <a:r>
-              <a:rPr lang="pt-BR" dirty="0"/>
-              <a:t>A rede prevê → mede o erro → corrige os pesos.</a:t>
-            </a:r>
-          </a:p>
-          <a:p>
-            <a:r>
-              <a:rPr lang="pt-BR" dirty="0" err="1"/>
-              <a:t>Backpropagation</a:t>
-            </a:r>
-            <a:r>
-              <a:rPr lang="pt-BR" dirty="0"/>
-              <a:t> determina quanto cada peso da rede contribuiu para o erro e o ajusta para minimizar esse erro.</a:t>
-            </a:r>
-          </a:p>
-          <a:p>
-            <a:r>
-              <a:rPr lang="pt-BR" dirty="0"/>
-              <a:t>O </a:t>
-            </a:r>
-            <a:r>
-              <a:rPr lang="pt-BR" dirty="0" err="1"/>
-              <a:t>backpropagation</a:t>
-            </a:r>
-            <a:r>
-              <a:rPr lang="pt-BR" dirty="0"/>
-              <a:t> responde à pergunta:</a:t>
-            </a:r>
-          </a:p>
-          <a:p>
-            <a:r>
-              <a:rPr lang="pt-BR" b="1" dirty="0"/>
-              <a:t>“Quais pesos precisam mudar e quanto precisam mudar para que a rede produza uma saída mais correta?”</a:t>
-            </a:r>
-            <a:endParaRPr lang="pt-BR" dirty="0"/>
-          </a:p>
-          <a:p>
-            <a:endParaRPr lang="en-US" dirty="0"/>
+            <a:pPr marL="0" indent="0">
+              <a:buNone/>
+            </a:pPr>
+            <a:r>
+              <a:rPr lang="pt-BR" sz="4800" b="1" dirty="0">
+                <a:solidFill>
+                  <a:srgbClr val="FF0000"/>
+                </a:solidFill>
+              </a:rPr>
+              <a:t>PAREI AQUI!!!!!!!!!</a:t>
+            </a:r>
+            <a:endParaRPr lang="en-US" sz="4800" b="1" dirty="0">
+              <a:solidFill>
+                <a:srgbClr val="FF0000"/>
+              </a:solidFill>
+            </a:endParaRPr>
           </a:p>
         </p:txBody>
       </p:sp>
     </p:spTree>
     <p:extLst>
       <p:ext uri="{BB962C8B-B14F-4D97-AF65-F5344CB8AC3E}">
-        <p14:creationId xmlns:p14="http://schemas.microsoft.com/office/powerpoint/2010/main" val="3050902542"/>
+        <p14:creationId xmlns:p14="http://schemas.microsoft.com/office/powerpoint/2010/main" val="3794195524"/>
       </p:ext>
     </p:extLst>
   </p:cSld>
